--- a/Docs/submission-deck.pptx
+++ b/Docs/submission-deck.pptx
@@ -7740,7 +7740,7 @@
               </a:defRPr>
             </a:pPr>
             <a:r>
-              <a:t>Current LLM reads protected geometry/labels, not PNG pixels; native extension QA pending.</a:t>
+              <a:t>Waves 1–4: selective preview, protect loop harness, privacy-only mode; G11 fail honest.</a:t>
             </a:r>
           </a:p>
         </p:txBody>
@@ -8300,7 +8300,7 @@
               </a:defRPr>
             </a:pPr>
             <a:r>
-              <a:t>Local browser + Qwen workflow observed; 75 recorded Node tests pass.</a:t>
+              <a:t>Local browser + optional Qwen; 107 Node tests pass (Wave4).</a:t>
             </a:r>
           </a:p>
           <a:p>
@@ -8316,7 +8316,7 @@
               </a:defRPr>
             </a:pPr>
             <a:r>
-              <a:t>Single desktop observation: capture 92 ms; face inference 9.6 ms.</a:t>
+              <a:t>Privacy-only mode skips planner; Chromium protect loop harness-verified.</a:t>
             </a:r>
           </a:p>
         </p:txBody>
@@ -8394,7 +8394,7 @@
               </a:defRPr>
             </a:pPr>
             <a:r>
-              <a:t>Real model step: 3,029 ms; full-flow &lt;200 ms target fails.</a:t>
+              <a:t>Real model step: 3,029 ms; full-flow &lt;200 ms target fails (G11).</a:t>
             </a:r>
           </a:p>
           <a:p>
@@ -8410,7 +8410,7 @@
               </a:defRPr>
             </a:pPr>
             <a:r>
-              <a:t>Face-only CV; context removal costs utility; no dataset PII accuracy yet.</a:t>
+              <a:t>Face-only CV; WebPII text retained PII on 58/100; toolbar needs human.</a:t>
             </a:r>
           </a:p>
         </p:txBody>
@@ -8488,7 +8488,7 @@
               </a:defRPr>
             </a:pPr>
             <a:r>
-              <a:t>Measure detection/utility on labeled held-out pages; profile cold/warm costs.</a:t>
+              <a:t>Held-out fixtures + privacy-only path + detector cache (Wave4).</a:t>
             </a:r>
           </a:p>
           <a:p>
@@ -8504,7 +8504,7 @@
               </a:defRPr>
             </a:pPr>
             <a:r>
-              <a:t>Fail closed on CV errors; explicit action review; expiry and schema checks.</a:t>
+              <a:t>Fail closed on sanitize; expiry/cancel recovery evidenced; judge checklist.</a:t>
             </a:r>
           </a:p>
         </p:txBody>

--- a/Docs/submission-deck.pptx
+++ b/Docs/submission-deck.pptx
@@ -644,7 +644,7 @@
           <a:lstStyle/>
           <a:p>
             <a:r>
-              <a:t>Uses the six content slides and heading/pointer structure from Raw/provided-template.pptx; retained supplied logos are template assets, not endorsement. The user supplied a 2025 reference. Its 2026 organizer applicability and registered team ID/name still require confirmation. Sightline is a working project name. Sources: https://www.sih.gov.in/sih2026PS; Benchmarks/results/operations-v01/summary.json; Benchmarks/results/operations-v01/face-scale-v01.json; Benchmarks/results/webpii-text-v01-summary.json; Benchmarks/results/prototype-unit-tests.txt</a:t>
+              <a:t>Uses the six content slides and heading/pointer structure from Raw/provided-template.pptx; retained supplied logos are template assets, not endorsement. The user supplied a 2025 reference. Its 2026 organizer applicability and registered team ID/name still require confirmation. Dhristi is a working project name. Sources: https://www.sih.gov.in/sih2026PS; Benchmarks/results/operations-v01/summary.json; Benchmarks/results/operations-v01/face-scale-v01.json; Benchmarks/results/webpii-text-v01-summary.json; Benchmarks/results/prototype-unit-tests.txt</a:t>
             </a:r>
           </a:p>
         </p:txBody>
@@ -758,7 +758,7 @@
           <a:lstStyle/>
           <a:p>
             <a:r>
-              <a:t>Uses the six content slides and heading/pointer structure from Raw/provided-template.pptx; retained supplied logos are template assets, not endorsement. The user supplied a 2025 reference. Its 2026 organizer applicability and registered team ID/name still require confirmation. Sightline is a working project name. Sources: https://www.sih.gov.in/sih2026PS; Benchmarks/results/operations-v01/summary.json; Benchmarks/results/operations-v01/face-scale-v01.json; Benchmarks/results/webpii-text-v01-summary.json; Benchmarks/results/prototype-unit-tests.txt</a:t>
+              <a:t>Uses the six content slides and heading/pointer structure from Raw/provided-template.pptx; retained supplied logos are template assets, not endorsement. The user supplied a 2025 reference. Its 2026 organizer applicability and registered team ID/name still require confirmation. Dhristi is a working project name. Sources: https://www.sih.gov.in/sih2026PS; Benchmarks/results/operations-v01/summary.json; Benchmarks/results/operations-v01/face-scale-v01.json; Benchmarks/results/webpii-text-v01-summary.json; Benchmarks/results/prototype-unit-tests.txt</a:t>
             </a:r>
           </a:p>
         </p:txBody>
@@ -872,7 +872,7 @@
           <a:lstStyle/>
           <a:p>
             <a:r>
-              <a:t>Uses the six content slides and heading/pointer structure from Raw/provided-template.pptx; retained supplied logos are template assets, not endorsement. The user supplied a 2025 reference. Its 2026 organizer applicability and registered team ID/name still require confirmation. Sightline is a working project name. Sources: https://www.sih.gov.in/sih2026PS; Benchmarks/results/operations-v01/summary.json; Benchmarks/results/operations-v01/face-scale-v01.json; Benchmarks/results/webpii-text-v01-summary.json; Benchmarks/results/prototype-unit-tests.txt</a:t>
+              <a:t>Uses the six content slides and heading/pointer structure from Raw/provided-template.pptx; retained supplied logos are template assets, not endorsement. The user supplied a 2025 reference. Its 2026 organizer applicability and registered team ID/name still require confirmation. Dhristi is a working project name. Sources: https://www.sih.gov.in/sih2026PS; Benchmarks/results/operations-v01/summary.json; Benchmarks/results/operations-v01/face-scale-v01.json; Benchmarks/results/webpii-text-v01-summary.json; Benchmarks/results/prototype-unit-tests.txt</a:t>
             </a:r>
           </a:p>
         </p:txBody>
@@ -1045,7 +1045,7 @@
           <a:lstStyle/>
           <a:p>
             <a:r>
-              <a:t>Uses the six content slides and heading/pointer structure from Raw/provided-template.pptx; retained supplied logos are template assets, not endorsement. The user supplied a 2025 reference. Its 2026 organizer applicability and registered team ID/name still require confirmation. Sightline is a working project name. Sources: https://www.sih.gov.in/sih2026PS; Benchmarks/results/operations-v01/summary.json; Benchmarks/results/operations-v01/face-scale-v01.json; Benchmarks/results/webpii-text-v01-summary.json; Benchmarks/results/prototype-unit-tests.txt</a:t>
+              <a:t>Uses the six content slides and heading/pointer structure from Raw/provided-template.pptx; retained supplied logos are template assets, not endorsement. The user supplied a 2025 reference. Its 2026 organizer applicability and registered team ID/name still require confirmation. Dhristi is a working project name. Sources: https://www.sih.gov.in/sih2026PS; Benchmarks/results/operations-v01/summary.json; Benchmarks/results/operations-v01/face-scale-v01.json; Benchmarks/results/webpii-text-v01-summary.json; Benchmarks/results/prototype-unit-tests.txt</a:t>
             </a:r>
           </a:p>
         </p:txBody>
@@ -1218,7 +1218,7 @@
           <a:lstStyle/>
           <a:p>
             <a:r>
-              <a:t>Uses the six content slides and heading/pointer structure from Raw/provided-template.pptx; retained supplied logos are template assets, not endorsement. The user supplied a 2025 reference. Its 2026 organizer applicability and registered team ID/name still require confirmation. Sightline is a working project name. Sources: https://www.sih.gov.in/sih2026PS; Benchmarks/results/operations-v01/summary.json; Benchmarks/results/operations-v01/face-scale-v01.json; Benchmarks/results/webpii-text-v01-summary.json; Benchmarks/results/prototype-unit-tests.txt</a:t>
+              <a:t>Uses the six content slides and heading/pointer structure from Raw/provided-template.pptx; retained supplied logos are template assets, not endorsement. The user supplied a 2025 reference. Its 2026 organizer applicability and registered team ID/name still require confirmation. Dhristi is a working project name. Sources: https://www.sih.gov.in/sih2026PS; Benchmarks/results/operations-v01/summary.json; Benchmarks/results/operations-v01/face-scale-v01.json; Benchmarks/results/webpii-text-v01-summary.json; Benchmarks/results/prototype-unit-tests.txt</a:t>
             </a:r>
           </a:p>
         </p:txBody>
@@ -1371,7 +1371,7 @@
           <a:lstStyle/>
           <a:p>
             <a:r>
-              <a:t>Uses the six content slides and heading/pointer structure from Raw/provided-template.pptx; retained supplied logos are template assets, not endorsement. The user supplied a 2025 reference. Its 2026 organizer applicability and registered team ID/name still require confirmation. Sightline is a working project name. Sources: https://www.sih.gov.in/sih2026PS; Benchmarks/results/operations-v01/summary.json; Benchmarks/results/operations-v01/face-scale-v01.json; Benchmarks/results/webpii-text-v01-summary.json; Benchmarks/results/prototype-unit-tests.txt</a:t>
+              <a:t>Uses the six content slides and heading/pointer structure from Raw/provided-template.pptx; retained supplied logos are template assets, not endorsement. The user supplied a 2025 reference. Its 2026 organizer applicability and registered team ID/name still require confirmation. Dhristi is a working project name. Sources: https://www.sih.gov.in/sih2026PS; Benchmarks/results/operations-v01/summary.json; Benchmarks/results/operations-v01/face-scale-v01.json; Benchmarks/results/webpii-text-v01-summary.json; Benchmarks/results/prototype-unit-tests.txt</a:t>
             </a:r>
           </a:p>
         </p:txBody>
@@ -5605,7 +5605,7 @@
               </a:defRPr>
             </a:pPr>
             <a:r>
-              <a:t>TITLE PAGE · SIGHTLINE</a:t>
+              <a:t>TITLE PAGE · DHRISTI</a:t>
             </a:r>
           </a:p>
         </p:txBody>
@@ -6139,7 +6139,7 @@
               </a:defRPr>
             </a:pPr>
             <a:r>
-              <a:t>SIGHTLINE</a:t>
+              <a:t>DHRISTI</a:t>
             </a:r>
           </a:p>
           <a:p>
@@ -6835,7 +6835,7 @@
               </a:defRPr>
             </a:pPr>
             <a:r>
-              <a:t>SIGHTLINE</a:t>
+              <a:t>DHRISTI</a:t>
             </a:r>
           </a:p>
           <a:p>
@@ -8126,7 +8126,7 @@
               </a:defRPr>
             </a:pPr>
             <a:r>
-              <a:t>SIGHTLINE</a:t>
+              <a:t>DHRISTI</a:t>
             </a:r>
           </a:p>
           <a:p>
@@ -8895,7 +8895,7 @@
               </a:defRPr>
             </a:pPr>
             <a:r>
-              <a:t>SIGHTLINE</a:t>
+              <a:t>DHRISTI</a:t>
             </a:r>
           </a:p>
           <a:p>
@@ -9772,7 +9772,7 @@
               </a:defRPr>
             </a:pPr>
             <a:r>
-              <a:t>SIGHTLINE</a:t>
+              <a:t>DHRISTI</a:t>
             </a:r>
           </a:p>
           <a:p>

--- a/Docs/submission-deck.pptx
+++ b/Docs/submission-deck.pptx
@@ -8300,7 +8300,7 @@
               </a:defRPr>
             </a:pPr>
             <a:r>
-              <a:t>Local browser + optional Qwen; 107 Node tests pass (Wave4).</a:t>
+              <a:t>Local browser + optional Qwen; 119 Node tests pass (measured 2026-09-15).</a:t>
             </a:r>
           </a:p>
           <a:p>
@@ -8316,7 +8316,7 @@
               </a:defRPr>
             </a:pPr>
             <a:r>
-              <a:t>Privacy-only mode skips planner; Chromium protect loop harness-verified.</a:t>
+              <a:t>Privacy-only + Score heuristic; Chromium protect loop harness-verified.</a:t>
             </a:r>
           </a:p>
         </p:txBody>
